--- a/VITVellore_Spark_Submission.pptx
+++ b/VITVellore_Spark_Submission.pptx
@@ -13840,7 +13840,7 @@
                 </a:solidFill>
                 <a:latin typeface="Arial"/>
               </a:rPr>
-              <a:t>Held-out split declared before tuning</a:t>
+              <a:t>Held-out split, run once after freeze</a:t>
             </a:r>
           </a:p>
           <a:p>
@@ -13859,7 +13859,7 @@
                 </a:solidFill>
                 <a:latin typeface="Calibri"/>
               </a:rPr>
-              <a:t>Costs nothing, cannot be retrofitted credibly, and is the only real answer to “did you overfit to your own demo?”</a:t>
+              <a:t>34 unseen scenarios: all six gates pass, one to two points below dev (recall 0.937). The honest answer to “did you overfit to your demo?”</a:t>
             </a:r>
           </a:p>
         </p:txBody>
@@ -20318,7 +20318,7 @@
                 </a:solidFill>
                 <a:latin typeface="Calibri"/>
               </a:rPr>
-              <a:t>Table: dev split, 40 scenarios, keyless provider. Right card: the same split on a real model. Held-out split reserved for one run.</a:t>
+              <a:t>Table: dev split, 40 scenarios, keyless provider. Right card: the same split on a real model. Held-out (34 unseen, run once): all six gates pass.</a:t>
             </a:r>
           </a:p>
         </p:txBody>
@@ -21523,7 +21523,7 @@
                 </a:solidFill>
                 <a:latin typeface="Calibri"/>
               </a:rPr>
-              <a:t>The table's −1.036 s assumes an instant model; with ~2 s real replies the median is +1.80 s (static RAG +2.07 s) and the p90 tail is worse (10.1 s vs 2.5 s).  ·  With a real model static RAG edges coverage (0.854 vs 0.833).  ·  Grounding is an automated check, not human review.  ·  No currency cost: no published price configured.</a:t>
+              <a:t>The table's −1.036 s assumes an instant model; with ~2 s real replies the median is +1.80 s (static RAG +2.07 s) and the p90 tail is worse (10.1 s vs 2.5 s).  ·  With a real model static RAG edges coverage (0.854 vs 0.833).  ·  Grounding is an automated check, not human review.  ·  Keyless mode declined 0 of 2 unanswerable held-out questions (near-misses).  ·  No currency cost: no published price configured.</a:t>
             </a:r>
           </a:p>
         </p:txBody>
